--- a/figure/cp4/fig4-3_tr_module.pptx
+++ b/figure/cp4/fig4-3_tr_module.pptx
@@ -856,13 +856,6 @@
 <file path=ppt/slides/slide1.xml><?xml version="1.0" encoding="utf-8"?>
 <p:sld xmlns:a="http://schemas.openxmlformats.org/drawingml/2006/main" xmlns:p="http://schemas.openxmlformats.org/presentationml/2006/main">
   <p:cSld name="Slide 1">
-    <p:bg>
-      <p:bgPr>
-        <a:solidFill>
-          <a:srgbClr val="FFFFFF"/>
-        </a:solidFill>
-      </p:bgPr>
-    </p:bg>
     <p:spTree>
       <p:nvGrpSpPr>
         <p:cNvPr id="1" name=""/>
@@ -879,14 +872,14 @@
       </p:grpSpPr>
       <p:sp>
         <p:nvSpPr>
-          <p:cNvPr id="2" name="Text 1"/>
-          <p:cNvSpPr/>
-          <p:nvPr/>
-        </p:nvSpPr>
-        <p:spPr>
-          <a:xfrm>
-            <a:off x="1453604" y="2523976"/>
-            <a:ext cx="201748" cy="95250"/>
+          <p:cNvPr id="2" name="Text 0"/>
+          <p:cNvSpPr/>
+          <p:nvPr/>
+        </p:nvSpPr>
+        <p:spPr>
+          <a:xfrm>
+            <a:off x="274320" y="2480310"/>
+            <a:ext cx="411480" cy="182880"/>
           </a:xfrm>
           <a:prstGeom prst="rect">
             <a:avLst/>
@@ -895,208 +888,102 @@
           <a:ln/>
         </p:spPr>
         <p:txBody>
-          <a:bodyPr wrap="square" lIns="0" tIns="0" rIns="0" bIns="0" rtlCol="0" anchor="t"/>
-          <a:lstStyle/>
-          <a:p>
-            <a:pPr marL="0" indent="0" algn="l">
-              <a:buNone/>
-            </a:pPr>
-            <a:r>
-              <a:rPr lang="en-US" sz="700" i="1" dirty="0">
-                <a:solidFill>
-                  <a:srgbClr val="666666"/>
-                </a:solidFill>
-                <a:latin typeface="Arial" pitchFamily="34" charset="0"/>
-                <a:ea typeface="Arial" pitchFamily="34" charset="-122"/>
-                <a:cs typeface="Arial" pitchFamily="34" charset="-120"/>
-              </a:rPr>
-              <a:t>Input</a:t>
-            </a:r>
-            <a:endParaRPr lang="en-US" sz="700" dirty="0"/>
-          </a:p>
-        </p:txBody>
-      </p:sp>
-      <p:sp>
-        <p:nvSpPr>
-          <p:cNvPr id="3" name="Text 2"/>
-          <p:cNvSpPr/>
-          <p:nvPr/>
-        </p:nvSpPr>
-        <p:spPr>
-          <a:xfrm>
-            <a:off x="1702147" y="2558951"/>
-            <a:ext cx="152400" cy="25301"/>
-          </a:xfrm>
-          <a:prstGeom prst="rect">
-            <a:avLst/>
-          </a:prstGeom>
-          <a:solidFill>
-            <a:srgbClr val="333333"/>
-          </a:solidFill>
-          <a:ln/>
-        </p:spPr>
-        <p:txBody>
           <a:bodyPr wrap="square" rtlCol="0" anchor="ctr"/>
-          <a:lstStyle/>
-          <a:p>
-            <a:pPr marL="0" indent="0">
-              <a:buNone/>
-            </a:pPr>
-            <a:endParaRPr lang="en-US" dirty="0"/>
-          </a:p>
-        </p:txBody>
-      </p:sp>
-      <p:sp>
-        <p:nvSpPr>
-          <p:cNvPr id="4" name="Text 3"/>
-          <p:cNvSpPr/>
-          <p:nvPr/>
-        </p:nvSpPr>
-        <p:spPr>
-          <a:xfrm>
-            <a:off x="1854547" y="2389138"/>
-            <a:ext cx="1071860" cy="364927"/>
-          </a:xfrm>
-          <a:prstGeom prst="roundRect">
-            <a:avLst>
-              <a:gd name="adj" fmla="val 13921"/>
-            </a:avLst>
-          </a:prstGeom>
-          <a:solidFill>
-            <a:srgbClr val="D6E4F0"/>
-          </a:solidFill>
-          <a:ln w="9525">
-            <a:solidFill>
-              <a:srgbClr val="B0C4DE"/>
-            </a:solidFill>
-          </a:ln>
-        </p:spPr>
-        <p:txBody>
-          <a:bodyPr wrap="square" rtlCol="0" anchor="ctr"/>
-          <a:lstStyle/>
-          <a:p>
-            <a:pPr marL="0" indent="0">
-              <a:buNone/>
-            </a:pPr>
-            <a:endParaRPr lang="en-US" dirty="0"/>
-          </a:p>
-        </p:txBody>
-      </p:sp>
-      <p:sp>
-        <p:nvSpPr>
-          <p:cNvPr id="5" name="Text 4"/>
-          <p:cNvSpPr/>
-          <p:nvPr/>
-        </p:nvSpPr>
-        <p:spPr>
-          <a:xfrm>
-            <a:off x="2008992" y="2500164"/>
-            <a:ext cx="762970" cy="142875"/>
-          </a:xfrm>
-          <a:prstGeom prst="rect">
-            <a:avLst/>
-          </a:prstGeom>
-          <a:noFill/>
-          <a:ln/>
-        </p:spPr>
-        <p:txBody>
-          <a:bodyPr wrap="square" lIns="0" tIns="0" rIns="0" bIns="0" rtlCol="0" anchor="t"/>
           <a:lstStyle/>
           <a:p>
             <a:pPr marL="0" indent="0" algn="ctr">
               <a:buNone/>
             </a:pPr>
             <a:r>
-              <a:rPr lang="en-US" sz="1000" dirty="0">
+              <a:rPr lang="en-US" sz="900" dirty="0">
                 <a:solidFill>
-                  <a:srgbClr val="333333"/>
+                  <a:srgbClr val="999999"/>
                 </a:solidFill>
-                <a:latin typeface="Arial" pitchFamily="34" charset="0"/>
-                <a:ea typeface="Arial" pitchFamily="34" charset="-122"/>
-                <a:cs typeface="Arial" pitchFamily="34" charset="-120"/>
+                <a:latin typeface="Times New Roman" pitchFamily="34" charset="0"/>
+                <a:ea typeface="Times New Roman" pitchFamily="34" charset="-122"/>
+                <a:cs typeface="Times New Roman" pitchFamily="34" charset="-120"/>
               </a:rPr>
-              <a:t>DWConv 3x3</a:t>
+              <a:t>Input</a:t>
             </a:r>
-            <a:endParaRPr lang="en-US" sz="1000" dirty="0"/>
-          </a:p>
-        </p:txBody>
-      </p:sp>
-      <p:sp>
-        <p:nvSpPr>
-          <p:cNvPr id="6" name="Text 5"/>
-          <p:cNvSpPr/>
-          <p:nvPr/>
-        </p:nvSpPr>
-        <p:spPr>
-          <a:xfrm>
-            <a:off x="2926407" y="2558951"/>
-            <a:ext cx="101501" cy="25301"/>
-          </a:xfrm>
-          <a:prstGeom prst="rect">
-            <a:avLst/>
-          </a:prstGeom>
-          <a:solidFill>
-            <a:srgbClr val="333333"/>
-          </a:solidFill>
-          <a:ln/>
-        </p:spPr>
-        <p:txBody>
-          <a:bodyPr wrap="square" rtlCol="0" anchor="ctr"/>
-          <a:lstStyle/>
-          <a:p>
-            <a:pPr marL="0" indent="0">
-              <a:buNone/>
-            </a:pPr>
-            <a:endParaRPr lang="en-US" dirty="0"/>
-          </a:p>
-        </p:txBody>
-      </p:sp>
-      <p:sp>
-        <p:nvSpPr>
-          <p:cNvPr id="7" name="Text 6"/>
-          <p:cNvSpPr/>
-          <p:nvPr/>
-        </p:nvSpPr>
-        <p:spPr>
-          <a:xfrm>
-            <a:off x="3027908" y="2412950"/>
-            <a:ext cx="317450" cy="317450"/>
+            <a:endParaRPr lang="en-US" sz="900" dirty="0"/>
+          </a:p>
+        </p:txBody>
+      </p:sp>
+      <p:sp>
+        <p:nvSpPr>
+          <p:cNvPr id="3" name="Shape 1"/>
+          <p:cNvSpPr/>
+          <p:nvPr/>
+        </p:nvSpPr>
+        <p:spPr>
+          <a:xfrm rot="0" flipH="0" flipV="0">
+            <a:off x="621792" y="2571750"/>
+            <a:ext cx="274320" cy="913"/>
+          </a:xfrm>
+          <a:prstGeom prst="line">
+            <a:avLst/>
+          </a:prstGeom>
+          <a:noFill/>
+          <a:ln w="10160">
+            <a:solidFill>
+              <a:srgbClr val="666666"/>
+            </a:solidFill>
+            <a:prstDash val="solid"/>
+            <a:tailEnd type="triangle"/>
+          </a:ln>
+        </p:spPr>
+        <p:txBody>
+          <a:bodyPr/>
+          <a:p>
+            <a:pPr/>
+            <a:endParaRPr/>
+          </a:p>
+        </p:txBody>
+      </p:sp>
+      <p:sp>
+        <p:nvSpPr>
+          <p:cNvPr id="4" name="Shape 2"/>
+          <p:cNvSpPr/>
+          <p:nvPr/>
+        </p:nvSpPr>
+        <p:spPr>
+          <a:xfrm>
+            <a:off x="896112" y="2343150"/>
+            <a:ext cx="1005840" cy="457200"/>
           </a:xfrm>
           <a:prstGeom prst="roundRect">
             <a:avLst>
-              <a:gd name="adj" fmla="val 288045"/>
+              <a:gd name="adj" fmla="val 8000"/>
             </a:avLst>
           </a:prstGeom>
           <a:solidFill>
-            <a:srgbClr val="FFFFFF"/>
-          </a:solidFill>
-          <a:ln w="19050">
+            <a:srgbClr val="DDEAF6"/>
+          </a:solidFill>
+          <a:ln w="10160">
             <a:solidFill>
-              <a:srgbClr val="333333"/>
+              <a:srgbClr val="5B9BD5"/>
             </a:solidFill>
+            <a:prstDash val="solid"/>
           </a:ln>
         </p:spPr>
         <p:txBody>
-          <a:bodyPr wrap="square" rtlCol="0" anchor="ctr"/>
-          <a:lstStyle/>
-          <a:p>
-            <a:pPr marL="0" indent="0">
-              <a:buNone/>
-            </a:pPr>
-            <a:endParaRPr lang="en-US" dirty="0"/>
-          </a:p>
-        </p:txBody>
-      </p:sp>
-      <p:sp>
-        <p:nvSpPr>
-          <p:cNvPr id="8" name="Text 7"/>
-          <p:cNvSpPr/>
-          <p:nvPr/>
-        </p:nvSpPr>
-        <p:spPr>
-          <a:xfrm>
-            <a:off x="3142059" y="2485876"/>
-            <a:ext cx="90779" cy="171450"/>
+          <a:bodyPr/>
+          <a:p>
+            <a:pPr/>
+            <a:endParaRPr/>
+          </a:p>
+        </p:txBody>
+      </p:sp>
+      <p:sp>
+        <p:nvSpPr>
+          <p:cNvPr id="5" name="Text 3"/>
+          <p:cNvSpPr/>
+          <p:nvPr/>
+        </p:nvSpPr>
+        <p:spPr>
+          <a:xfrm>
+            <a:off x="896112" y="2343150"/>
+            <a:ext cx="1005840" cy="457200"/>
           </a:xfrm>
           <a:prstGeom prst="rect">
             <a:avLst/>
@@ -1105,217 +992,7 @@
           <a:ln/>
         </p:spPr>
         <p:txBody>
-          <a:bodyPr wrap="square" lIns="0" tIns="0" rIns="0" bIns="0" rtlCol="0" anchor="t"/>
-          <a:lstStyle/>
-          <a:p>
-            <a:pPr marL="0" indent="0" algn="l">
-              <a:buNone/>
-            </a:pPr>
-            <a:r>
-              <a:rPr lang="en-US" sz="1200" b="1" dirty="0">
-                <a:solidFill>
-                  <a:srgbClr val="333333"/>
-                </a:solidFill>
-                <a:latin typeface="Arial" pitchFamily="34" charset="0"/>
-                <a:ea typeface="Arial" pitchFamily="34" charset="-122"/>
-                <a:cs typeface="Arial" pitchFamily="34" charset="-120"/>
-              </a:rPr>
-              <a:t>+</a:t>
-            </a:r>
-            <a:endParaRPr lang="en-US" sz="1200" dirty="0"/>
-          </a:p>
-        </p:txBody>
-      </p:sp>
-      <p:sp>
-        <p:nvSpPr>
-          <p:cNvPr id="9" name="Text 8"/>
-          <p:cNvSpPr/>
-          <p:nvPr/>
-        </p:nvSpPr>
-        <p:spPr>
-          <a:xfrm>
-            <a:off x="3345359" y="2558951"/>
-            <a:ext cx="152400" cy="25301"/>
-          </a:xfrm>
-          <a:prstGeom prst="rect">
-            <a:avLst/>
-          </a:prstGeom>
-          <a:solidFill>
-            <a:srgbClr val="333333"/>
-          </a:solidFill>
-          <a:ln/>
-        </p:spPr>
-        <p:txBody>
           <a:bodyPr wrap="square" rtlCol="0" anchor="ctr"/>
-          <a:lstStyle/>
-          <a:p>
-            <a:pPr marL="0" indent="0">
-              <a:buNone/>
-            </a:pPr>
-            <a:endParaRPr lang="en-US" dirty="0"/>
-          </a:p>
-        </p:txBody>
-      </p:sp>
-      <p:sp>
-        <p:nvSpPr>
-          <p:cNvPr id="10" name="Text 9"/>
-          <p:cNvSpPr/>
-          <p:nvPr/>
-        </p:nvSpPr>
-        <p:spPr>
-          <a:xfrm>
-            <a:off x="3497759" y="2414439"/>
-            <a:ext cx="435322" cy="314325"/>
-          </a:xfrm>
-          <a:prstGeom prst="roundRect">
-            <a:avLst>
-              <a:gd name="adj" fmla="val 16162"/>
-            </a:avLst>
-          </a:prstGeom>
-          <a:solidFill>
-            <a:srgbClr val="D6E4F0"/>
-          </a:solidFill>
-          <a:ln w="9525">
-            <a:solidFill>
-              <a:srgbClr val="B0C4DE"/>
-            </a:solidFill>
-          </a:ln>
-        </p:spPr>
-        <p:txBody>
-          <a:bodyPr wrap="square" rtlCol="0" anchor="ctr"/>
-          <a:lstStyle/>
-          <a:p>
-            <a:pPr marL="0" indent="0">
-              <a:buNone/>
-            </a:pPr>
-            <a:endParaRPr lang="en-US" dirty="0"/>
-          </a:p>
-        </p:txBody>
-      </p:sp>
-      <p:sp>
-        <p:nvSpPr>
-          <p:cNvPr id="11" name="Text 10"/>
-          <p:cNvSpPr/>
-          <p:nvPr/>
-        </p:nvSpPr>
-        <p:spPr>
-          <a:xfrm>
-            <a:off x="3632610" y="2500164"/>
-            <a:ext cx="165619" cy="142875"/>
-          </a:xfrm>
-          <a:prstGeom prst="rect">
-            <a:avLst/>
-          </a:prstGeom>
-          <a:noFill/>
-          <a:ln/>
-        </p:spPr>
-        <p:txBody>
-          <a:bodyPr wrap="square" lIns="0" tIns="0" rIns="0" bIns="0" rtlCol="0" anchor="t"/>
-          <a:lstStyle/>
-          <a:p>
-            <a:pPr marL="0" indent="0" algn="ctr">
-              <a:buNone/>
-            </a:pPr>
-            <a:r>
-              <a:rPr lang="en-US" sz="1000" dirty="0">
-                <a:solidFill>
-                  <a:srgbClr val="333333"/>
-                </a:solidFill>
-                <a:latin typeface="Arial" pitchFamily="34" charset="0"/>
-                <a:ea typeface="Arial" pitchFamily="34" charset="-122"/>
-                <a:cs typeface="Arial" pitchFamily="34" charset="-120"/>
-              </a:rPr>
-              <a:t>LN</a:t>
-            </a:r>
-            <a:endParaRPr lang="en-US" sz="1000" dirty="0"/>
-          </a:p>
-        </p:txBody>
-      </p:sp>
-      <p:sp>
-        <p:nvSpPr>
-          <p:cNvPr id="12" name="Text 11"/>
-          <p:cNvSpPr/>
-          <p:nvPr/>
-        </p:nvSpPr>
-        <p:spPr>
-          <a:xfrm>
-            <a:off x="3933081" y="2558951"/>
-            <a:ext cx="101501" cy="25301"/>
-          </a:xfrm>
-          <a:prstGeom prst="rect">
-            <a:avLst/>
-          </a:prstGeom>
-          <a:solidFill>
-            <a:srgbClr val="333333"/>
-          </a:solidFill>
-          <a:ln/>
-        </p:spPr>
-        <p:txBody>
-          <a:bodyPr wrap="square" rtlCol="0" anchor="ctr"/>
-          <a:lstStyle/>
-          <a:p>
-            <a:pPr marL="0" indent="0">
-              <a:buNone/>
-            </a:pPr>
-            <a:endParaRPr lang="en-US" dirty="0"/>
-          </a:p>
-        </p:txBody>
-      </p:sp>
-      <p:sp>
-        <p:nvSpPr>
-          <p:cNvPr id="13" name="Text 12"/>
-          <p:cNvSpPr/>
-          <p:nvPr/>
-        </p:nvSpPr>
-        <p:spPr>
-          <a:xfrm>
-            <a:off x="4034582" y="2320975"/>
-            <a:ext cx="1073497" cy="501402"/>
-          </a:xfrm>
-          <a:prstGeom prst="roundRect">
-            <a:avLst>
-              <a:gd name="adj" fmla="val 10132"/>
-            </a:avLst>
-          </a:prstGeom>
-          <a:solidFill>
-            <a:srgbClr val="D6E4F0"/>
-          </a:solidFill>
-          <a:ln w="9525">
-            <a:solidFill>
-              <a:srgbClr val="B0C4DE"/>
-            </a:solidFill>
-          </a:ln>
-        </p:spPr>
-        <p:txBody>
-          <a:bodyPr wrap="square" rtlCol="0" anchor="ctr"/>
-          <a:lstStyle/>
-          <a:p>
-            <a:pPr marL="0" indent="0">
-              <a:buNone/>
-            </a:pPr>
-            <a:endParaRPr lang="en-US" dirty="0"/>
-          </a:p>
-        </p:txBody>
-      </p:sp>
-      <p:sp>
-        <p:nvSpPr>
-          <p:cNvPr id="14" name="Text 13"/>
-          <p:cNvSpPr/>
-          <p:nvPr/>
-        </p:nvSpPr>
-        <p:spPr>
-          <a:xfrm>
-            <a:off x="4163052" y="2432000"/>
-            <a:ext cx="816557" cy="133350"/>
-          </a:xfrm>
-          <a:prstGeom prst="rect">
-            <a:avLst/>
-          </a:prstGeom>
-          <a:noFill/>
-          <a:ln/>
-        </p:spPr>
-        <p:txBody>
-          <a:bodyPr wrap="square" lIns="0" tIns="0" rIns="0" bIns="0" rtlCol="0" anchor="t"/>
           <a:lstStyle/>
           <a:p>
             <a:pPr marL="0" indent="0" algn="ctr">
@@ -1326,11 +1003,11 @@
                 <a:solidFill>
                   <a:srgbClr val="333333"/>
                 </a:solidFill>
-                <a:latin typeface="Arial" pitchFamily="34" charset="0"/>
-                <a:ea typeface="Arial" pitchFamily="34" charset="-122"/>
-                <a:cs typeface="Arial" pitchFamily="34" charset="-120"/>
+                <a:latin typeface="Times New Roman" pitchFamily="34" charset="0"/>
+                <a:ea typeface="Times New Roman" pitchFamily="34" charset="-122"/>
+                <a:cs typeface="Times New Roman" pitchFamily="34" charset="-120"/>
               </a:rPr>
-              <a:t>Bi-level Routing</a:t>
+              <a:t>DWConv 3×3</a:t>
             </a:r>
             <a:endParaRPr lang="en-US" sz="900" dirty="0"/>
           </a:p>
@@ -1338,14 +1015,76 @@
       </p:sp>
       <p:sp>
         <p:nvSpPr>
-          <p:cNvPr id="15" name="Text 14"/>
-          <p:cNvSpPr/>
-          <p:nvPr/>
-        </p:nvSpPr>
-        <p:spPr>
-          <a:xfrm>
-            <a:off x="4341120" y="2578001"/>
-            <a:ext cx="460272" cy="133350"/>
+          <p:cNvPr id="6" name="Shape 4"/>
+          <p:cNvSpPr/>
+          <p:nvPr/>
+        </p:nvSpPr>
+        <p:spPr>
+          <a:xfrm>
+            <a:off x="1901952" y="2571750"/>
+            <a:ext cx="164592" cy="914"/>
+          </a:xfrm>
+          <a:prstGeom prst="line">
+            <a:avLst/>
+          </a:prstGeom>
+          <a:noFill/>
+          <a:ln w="10160">
+            <a:solidFill>
+              <a:srgbClr val="666666"/>
+            </a:solidFill>
+            <a:prstDash val="solid"/>
+          </a:ln>
+        </p:spPr>
+        <p:txBody>
+          <a:bodyPr/>
+          <a:p>
+            <a:pPr/>
+            <a:endParaRPr/>
+          </a:p>
+        </p:txBody>
+      </p:sp>
+      <p:sp>
+        <p:nvSpPr>
+          <p:cNvPr id="7" name="Shape 5"/>
+          <p:cNvSpPr/>
+          <p:nvPr/>
+        </p:nvSpPr>
+        <p:spPr>
+          <a:xfrm>
+            <a:off x="2066544" y="2434590"/>
+            <a:ext cx="274320" cy="274320"/>
+          </a:xfrm>
+          <a:prstGeom prst="ellipse">
+            <a:avLst/>
+          </a:prstGeom>
+          <a:solidFill>
+            <a:srgbClr val="FFFFFF"/>
+          </a:solidFill>
+          <a:ln w="10160">
+            <a:solidFill>
+              <a:srgbClr val="999999"/>
+            </a:solidFill>
+            <a:prstDash val="solid"/>
+          </a:ln>
+        </p:spPr>
+        <p:txBody>
+          <a:bodyPr/>
+          <a:p>
+            <a:pPr/>
+            <a:endParaRPr/>
+          </a:p>
+        </p:txBody>
+      </p:sp>
+      <p:sp>
+        <p:nvSpPr>
+          <p:cNvPr id="8" name="Text 6"/>
+          <p:cNvSpPr/>
+          <p:nvPr/>
+        </p:nvSpPr>
+        <p:spPr>
+          <a:xfrm>
+            <a:off x="2066544" y="2434590"/>
+            <a:ext cx="274320" cy="274320"/>
           </a:xfrm>
           <a:prstGeom prst="rect">
             <a:avLst/>
@@ -1354,13 +1093,205 @@
           <a:ln/>
         </p:spPr>
         <p:txBody>
-          <a:bodyPr wrap="square" lIns="0" tIns="0" rIns="0" bIns="0" rtlCol="0" anchor="t"/>
+          <a:bodyPr wrap="square" rtlCol="0" anchor="ctr"/>
           <a:lstStyle/>
           <a:p>
             <a:pPr marL="0" indent="0" algn="ctr">
-              <a:spcBef>
-                <a:spcPts val="100"/>
-              </a:spcBef>
+              <a:buNone/>
+            </a:pPr>
+            <a:r>
+              <a:rPr lang="en-US" sz="1000" b="1" dirty="0">
+                <a:solidFill>
+                  <a:srgbClr val="333333"/>
+                </a:solidFill>
+                <a:latin typeface="Times New Roman" pitchFamily="34" charset="0"/>
+                <a:ea typeface="Times New Roman" pitchFamily="34" charset="-122"/>
+                <a:cs typeface="Times New Roman" pitchFamily="34" charset="-120"/>
+              </a:rPr>
+              <a:t>+</a:t>
+            </a:r>
+            <a:endParaRPr lang="en-US" sz="1000" dirty="0"/>
+          </a:p>
+        </p:txBody>
+      </p:sp>
+      <p:sp>
+        <p:nvSpPr>
+          <p:cNvPr id="9" name="Shape 7"/>
+          <p:cNvSpPr/>
+          <p:nvPr/>
+        </p:nvSpPr>
+        <p:spPr>
+          <a:xfrm flipV="1">
+            <a:off x="731520" y="2087118"/>
+            <a:ext cx="914" cy="484632"/>
+          </a:xfrm>
+          <a:prstGeom prst="line">
+            <a:avLst/>
+          </a:prstGeom>
+          <a:noFill/>
+          <a:ln w="10160">
+            <a:solidFill>
+              <a:srgbClr val="666666"/>
+            </a:solidFill>
+            <a:prstDash val="solid"/>
+          </a:ln>
+        </p:spPr>
+        <p:txBody>
+          <a:bodyPr/>
+          <a:p>
+            <a:pPr/>
+            <a:endParaRPr/>
+          </a:p>
+        </p:txBody>
+      </p:sp>
+      <p:sp>
+        <p:nvSpPr>
+          <p:cNvPr id="10" name="Shape 8"/>
+          <p:cNvSpPr/>
+          <p:nvPr/>
+        </p:nvSpPr>
+        <p:spPr>
+          <a:xfrm>
+            <a:off x="731520" y="2087118"/>
+            <a:ext cx="1472184" cy="914"/>
+          </a:xfrm>
+          <a:prstGeom prst="line">
+            <a:avLst/>
+          </a:prstGeom>
+          <a:noFill/>
+          <a:ln w="10160">
+            <a:solidFill>
+              <a:srgbClr val="666666"/>
+            </a:solidFill>
+            <a:prstDash val="solid"/>
+          </a:ln>
+        </p:spPr>
+        <p:txBody>
+          <a:bodyPr/>
+          <a:p>
+            <a:pPr/>
+            <a:endParaRPr/>
+          </a:p>
+        </p:txBody>
+      </p:sp>
+      <p:sp>
+        <p:nvSpPr>
+          <p:cNvPr id="11" name="Shape 9"/>
+          <p:cNvSpPr/>
+          <p:nvPr/>
+        </p:nvSpPr>
+        <p:spPr>
+          <a:xfrm>
+            <a:off x="2203704" y="2087118"/>
+            <a:ext cx="914" cy="347472"/>
+          </a:xfrm>
+          <a:prstGeom prst="line">
+            <a:avLst/>
+          </a:prstGeom>
+          <a:noFill/>
+          <a:ln w="10160">
+            <a:solidFill>
+              <a:srgbClr val="666666"/>
+            </a:solidFill>
+            <a:prstDash val="solid"/>
+            <a:tailEnd type="triangle"/>
+          </a:ln>
+        </p:spPr>
+        <p:txBody>
+          <a:bodyPr/>
+          <a:p>
+            <a:pPr/>
+            <a:endParaRPr/>
+          </a:p>
+        </p:txBody>
+      </p:sp>
+      <p:sp>
+        <p:nvSpPr>
+          <p:cNvPr id="12" name="Shape 10"/>
+          <p:cNvSpPr/>
+          <p:nvPr/>
+        </p:nvSpPr>
+        <p:spPr>
+          <a:xfrm rot="0" flipH="0" flipV="1">
+            <a:off x="2340864" y="2570861"/>
+            <a:ext cx="786384" cy="888"/>
+          </a:xfrm>
+          <a:prstGeom prst="line">
+            <a:avLst/>
+          </a:prstGeom>
+          <a:noFill/>
+          <a:ln w="10160">
+            <a:solidFill>
+              <a:srgbClr val="666666"/>
+            </a:solidFill>
+            <a:prstDash val="solid"/>
+            <a:tailEnd type="triangle"/>
+          </a:ln>
+        </p:spPr>
+        <p:txBody>
+          <a:bodyPr/>
+          <a:p>
+            <a:pPr/>
+            <a:endParaRPr/>
+          </a:p>
+        </p:txBody>
+      </p:sp>
+      <p:sp>
+        <p:nvSpPr>
+          <p:cNvPr id="13" name="Shape 14"/>
+          <p:cNvSpPr/>
+          <p:nvPr/>
+        </p:nvSpPr>
+        <p:spPr>
+          <a:xfrm>
+            <a:off x="3127248" y="2343150"/>
+            <a:ext cx="1371600" cy="457200"/>
+          </a:xfrm>
+          <a:prstGeom prst="roundRect">
+            <a:avLst>
+              <a:gd name="adj" fmla="val 8000"/>
+            </a:avLst>
+          </a:prstGeom>
+          <a:solidFill>
+            <a:srgbClr val="C5D9F1"/>
+          </a:solidFill>
+          <a:ln w="10160">
+            <a:solidFill>
+              <a:srgbClr val="4472C4"/>
+            </a:solidFill>
+            <a:prstDash val="solid"/>
+          </a:ln>
+        </p:spPr>
+        <p:txBody>
+          <a:bodyPr/>
+          <a:p>
+            <a:pPr/>
+            <a:endParaRPr/>
+          </a:p>
+        </p:txBody>
+      </p:sp>
+      <p:sp>
+        <p:nvSpPr>
+          <p:cNvPr id="14" name="Text 15"/>
+          <p:cNvSpPr/>
+          <p:nvPr/>
+        </p:nvSpPr>
+        <p:spPr>
+          <a:xfrm>
+            <a:off x="3127248" y="2343150"/>
+            <a:ext cx="1371600" cy="457200"/>
+          </a:xfrm>
+          <a:prstGeom prst="rect">
+            <a:avLst/>
+          </a:prstGeom>
+          <a:noFill/>
+          <a:ln/>
+        </p:spPr>
+        <p:txBody>
+          <a:bodyPr wrap="square" rtlCol="0" anchor="ctr"/>
+          <a:lstStyle/>
+          <a:p>
+            <a:pPr marL="0" indent="0" algn="ctr">
               <a:buNone/>
             </a:pPr>
             <a:r>
@@ -1368,9 +1299,26 @@
                 <a:solidFill>
                   <a:srgbClr val="333333"/>
                 </a:solidFill>
-                <a:latin typeface="Arial" pitchFamily="34" charset="0"/>
-                <a:ea typeface="Arial" pitchFamily="34" charset="-122"/>
-                <a:cs typeface="Arial" pitchFamily="34" charset="-120"/>
+                <a:latin typeface="Times New Roman" pitchFamily="34" charset="0"/>
+                <a:ea typeface="Times New Roman" pitchFamily="34" charset="-122"/>
+                <a:cs typeface="Times New Roman" pitchFamily="34" charset="-120"/>
+              </a:rPr>
+              <a:t>Bi-level Routing</a:t>
+            </a:r>
+            <a:endParaRPr lang="en-US" sz="900" dirty="0"/>
+          </a:p>
+          <a:p>
+            <a:pPr marL="0" indent="0" algn="ctr">
+              <a:buNone/>
+            </a:pPr>
+            <a:r>
+              <a:rPr lang="en-US" sz="900" dirty="0">
+                <a:solidFill>
+                  <a:srgbClr val="333333"/>
+                </a:solidFill>
+                <a:latin typeface="Times New Roman" pitchFamily="34" charset="0"/>
+                <a:ea typeface="Times New Roman" pitchFamily="34" charset="-122"/>
+                <a:cs typeface="Times New Roman" pitchFamily="34" charset="-120"/>
               </a:rPr>
               <a:t>Attention</a:t>
             </a:r>
@@ -1380,80 +1328,76 @@
       </p:sp>
       <p:sp>
         <p:nvSpPr>
-          <p:cNvPr id="16" name="Text 15"/>
-          <p:cNvSpPr/>
-          <p:nvPr/>
-        </p:nvSpPr>
-        <p:spPr>
-          <a:xfrm>
-            <a:off x="5108079" y="2558951"/>
-            <a:ext cx="101501" cy="25301"/>
-          </a:xfrm>
-          <a:prstGeom prst="rect">
-            <a:avLst/>
-          </a:prstGeom>
-          <a:solidFill>
-            <a:srgbClr val="333333"/>
-          </a:solidFill>
-          <a:ln/>
-        </p:spPr>
-        <p:txBody>
-          <a:bodyPr wrap="square" rtlCol="0" anchor="ctr"/>
-          <a:lstStyle/>
-          <a:p>
-            <a:pPr marL="0" indent="0">
-              <a:buNone/>
-            </a:pPr>
-            <a:endParaRPr lang="en-US" dirty="0"/>
-          </a:p>
-        </p:txBody>
-      </p:sp>
-      <p:sp>
-        <p:nvSpPr>
-          <p:cNvPr id="17" name="Text 16"/>
-          <p:cNvSpPr/>
-          <p:nvPr/>
-        </p:nvSpPr>
-        <p:spPr>
-          <a:xfrm>
-            <a:off x="5209580" y="2412950"/>
-            <a:ext cx="317450" cy="317450"/>
-          </a:xfrm>
-          <a:prstGeom prst="roundRect">
-            <a:avLst>
-              <a:gd name="adj" fmla="val 288045"/>
-            </a:avLst>
+          <p:cNvPr id="15" name="Shape 16"/>
+          <p:cNvSpPr/>
+          <p:nvPr/>
+        </p:nvSpPr>
+        <p:spPr>
+          <a:xfrm>
+            <a:off x="4498848" y="2571750"/>
+            <a:ext cx="164592" cy="914"/>
+          </a:xfrm>
+          <a:prstGeom prst="line">
+            <a:avLst/>
+          </a:prstGeom>
+          <a:noFill/>
+          <a:ln w="10160">
+            <a:solidFill>
+              <a:srgbClr val="666666"/>
+            </a:solidFill>
+            <a:prstDash val="solid"/>
+          </a:ln>
+        </p:spPr>
+        <p:txBody>
+          <a:bodyPr/>
+          <a:p>
+            <a:pPr/>
+            <a:endParaRPr/>
+          </a:p>
+        </p:txBody>
+      </p:sp>
+      <p:sp>
+        <p:nvSpPr>
+          <p:cNvPr id="16" name="Shape 17"/>
+          <p:cNvSpPr/>
+          <p:nvPr/>
+        </p:nvSpPr>
+        <p:spPr>
+          <a:xfrm>
+            <a:off x="4663440" y="2434590"/>
+            <a:ext cx="274320" cy="274320"/>
+          </a:xfrm>
+          <a:prstGeom prst="ellipse">
+            <a:avLst/>
           </a:prstGeom>
           <a:solidFill>
             <a:srgbClr val="FFFFFF"/>
           </a:solidFill>
-          <a:ln w="19050">
+          <a:ln w="10160">
             <a:solidFill>
-              <a:srgbClr val="333333"/>
+              <a:srgbClr val="999999"/>
             </a:solidFill>
+            <a:prstDash val="solid"/>
           </a:ln>
         </p:spPr>
         <p:txBody>
-          <a:bodyPr wrap="square" rtlCol="0" anchor="ctr"/>
-          <a:lstStyle/>
-          <a:p>
-            <a:pPr marL="0" indent="0">
-              <a:buNone/>
-            </a:pPr>
-            <a:endParaRPr lang="en-US" dirty="0"/>
-          </a:p>
-        </p:txBody>
-      </p:sp>
-      <p:sp>
-        <p:nvSpPr>
-          <p:cNvPr id="18" name="Text 17"/>
-          <p:cNvSpPr/>
-          <p:nvPr/>
-        </p:nvSpPr>
-        <p:spPr>
-          <a:xfrm>
-            <a:off x="5323731" y="2485876"/>
-            <a:ext cx="90779" cy="171450"/>
+          <a:bodyPr/>
+          <a:p>
+            <a:pPr/>
+            <a:endParaRPr/>
+          </a:p>
+        </p:txBody>
+      </p:sp>
+      <p:sp>
+        <p:nvSpPr>
+          <p:cNvPr id="17" name="Text 18"/>
+          <p:cNvSpPr/>
+          <p:nvPr/>
+        </p:nvSpPr>
+        <p:spPr>
+          <a:xfrm>
+            <a:off x="4663440" y="2434590"/>
+            <a:ext cx="274320" cy="274320"/>
           </a:xfrm>
           <a:prstGeom prst="rect">
             <a:avLst/>
@@ -1462,127 +1406,22 @@
           <a:ln/>
         </p:spPr>
         <p:txBody>
-          <a:bodyPr wrap="square" lIns="0" tIns="0" rIns="0" bIns="0" rtlCol="0" anchor="t"/>
-          <a:lstStyle/>
-          <a:p>
-            <a:pPr marL="0" indent="0" algn="l">
-              <a:buNone/>
-            </a:pPr>
-            <a:r>
-              <a:rPr lang="en-US" sz="1200" b="1" dirty="0">
-                <a:solidFill>
-                  <a:srgbClr val="333333"/>
-                </a:solidFill>
-                <a:latin typeface="Arial" pitchFamily="34" charset="0"/>
-                <a:ea typeface="Arial" pitchFamily="34" charset="-122"/>
-                <a:cs typeface="Arial" pitchFamily="34" charset="-120"/>
-              </a:rPr>
-              <a:t>+</a:t>
-            </a:r>
-            <a:endParaRPr lang="en-US" sz="1200" dirty="0"/>
-          </a:p>
-        </p:txBody>
-      </p:sp>
-      <p:sp>
-        <p:nvSpPr>
-          <p:cNvPr id="19" name="Text 18"/>
-          <p:cNvSpPr/>
-          <p:nvPr/>
-        </p:nvSpPr>
-        <p:spPr>
-          <a:xfrm>
-            <a:off x="5527030" y="2558951"/>
-            <a:ext cx="152400" cy="25301"/>
-          </a:xfrm>
-          <a:prstGeom prst="rect">
-            <a:avLst/>
-          </a:prstGeom>
-          <a:solidFill>
-            <a:srgbClr val="333333"/>
-          </a:solidFill>
-          <a:ln/>
-        </p:spPr>
-        <p:txBody>
           <a:bodyPr wrap="square" rtlCol="0" anchor="ctr"/>
-          <a:lstStyle/>
-          <a:p>
-            <a:pPr marL="0" indent="0">
-              <a:buNone/>
-            </a:pPr>
-            <a:endParaRPr lang="en-US" dirty="0"/>
-          </a:p>
-        </p:txBody>
-      </p:sp>
-      <p:sp>
-        <p:nvSpPr>
-          <p:cNvPr id="20" name="Text 19"/>
-          <p:cNvSpPr/>
-          <p:nvPr/>
-        </p:nvSpPr>
-        <p:spPr>
-          <a:xfrm>
-            <a:off x="5679430" y="2414439"/>
-            <a:ext cx="435322" cy="314325"/>
-          </a:xfrm>
-          <a:prstGeom prst="roundRect">
-            <a:avLst>
-              <a:gd name="adj" fmla="val 16162"/>
-            </a:avLst>
-          </a:prstGeom>
-          <a:solidFill>
-            <a:srgbClr val="D6E4F0"/>
-          </a:solidFill>
-          <a:ln w="9525">
-            <a:solidFill>
-              <a:srgbClr val="B0C4DE"/>
-            </a:solidFill>
-          </a:ln>
-        </p:spPr>
-        <p:txBody>
-          <a:bodyPr wrap="square" rtlCol="0" anchor="ctr"/>
-          <a:lstStyle/>
-          <a:p>
-            <a:pPr marL="0" indent="0">
-              <a:buNone/>
-            </a:pPr>
-            <a:endParaRPr lang="en-US" dirty="0"/>
-          </a:p>
-        </p:txBody>
-      </p:sp>
-      <p:sp>
-        <p:nvSpPr>
-          <p:cNvPr id="21" name="Text 20"/>
-          <p:cNvSpPr/>
-          <p:nvPr/>
-        </p:nvSpPr>
-        <p:spPr>
-          <a:xfrm>
-            <a:off x="5814282" y="2500164"/>
-            <a:ext cx="165619" cy="142875"/>
-          </a:xfrm>
-          <a:prstGeom prst="rect">
-            <a:avLst/>
-          </a:prstGeom>
-          <a:noFill/>
-          <a:ln/>
-        </p:spPr>
-        <p:txBody>
-          <a:bodyPr wrap="square" lIns="0" tIns="0" rIns="0" bIns="0" rtlCol="0" anchor="t"/>
           <a:lstStyle/>
           <a:p>
             <a:pPr marL="0" indent="0" algn="ctr">
               <a:buNone/>
             </a:pPr>
             <a:r>
-              <a:rPr lang="en-US" sz="1000" dirty="0">
+              <a:rPr lang="en-US" sz="1000" b="1" dirty="0">
                 <a:solidFill>
                   <a:srgbClr val="333333"/>
                 </a:solidFill>
-                <a:latin typeface="Arial" pitchFamily="34" charset="0"/>
-                <a:ea typeface="Arial" pitchFamily="34" charset="-122"/>
-                <a:cs typeface="Arial" pitchFamily="34" charset="-120"/>
+                <a:latin typeface="Times New Roman" pitchFamily="34" charset="0"/>
+                <a:ea typeface="Times New Roman" pitchFamily="34" charset="-122"/>
+                <a:cs typeface="Times New Roman" pitchFamily="34" charset="-120"/>
               </a:rPr>
-              <a:t>LN</a:t>
+              <a:t>+</a:t>
             </a:r>
             <a:endParaRPr lang="en-US" sz="1000" dirty="0"/>
           </a:p>
@@ -1590,80 +1429,170 @@
       </p:sp>
       <p:sp>
         <p:nvSpPr>
-          <p:cNvPr id="22" name="Text 21"/>
-          <p:cNvSpPr/>
-          <p:nvPr/>
-        </p:nvSpPr>
-        <p:spPr>
-          <a:xfrm>
-            <a:off x="6114752" y="2558951"/>
-            <a:ext cx="101501" cy="25301"/>
-          </a:xfrm>
-          <a:prstGeom prst="rect">
-            <a:avLst/>
-          </a:prstGeom>
-          <a:solidFill>
-            <a:srgbClr val="333333"/>
-          </a:solidFill>
-          <a:ln/>
-        </p:spPr>
-        <p:txBody>
-          <a:bodyPr wrap="square" rtlCol="0" anchor="ctr"/>
-          <a:lstStyle/>
-          <a:p>
-            <a:pPr marL="0" indent="0">
-              <a:buNone/>
-            </a:pPr>
-            <a:endParaRPr lang="en-US" dirty="0"/>
-          </a:p>
-        </p:txBody>
-      </p:sp>
-      <p:sp>
-        <p:nvSpPr>
-          <p:cNvPr id="23" name="Text 22"/>
-          <p:cNvSpPr/>
-          <p:nvPr/>
-        </p:nvSpPr>
-        <p:spPr>
-          <a:xfrm>
-            <a:off x="6216253" y="2389138"/>
-            <a:ext cx="585043" cy="364927"/>
+          <p:cNvPr id="18" name="Shape 19"/>
+          <p:cNvSpPr/>
+          <p:nvPr/>
+        </p:nvSpPr>
+        <p:spPr>
+          <a:xfrm>
+            <a:off x="2505456" y="2571750"/>
+            <a:ext cx="914" cy="484632"/>
+          </a:xfrm>
+          <a:prstGeom prst="line">
+            <a:avLst/>
+          </a:prstGeom>
+          <a:noFill/>
+          <a:ln w="10160">
+            <a:solidFill>
+              <a:srgbClr val="666666"/>
+            </a:solidFill>
+            <a:prstDash val="solid"/>
+          </a:ln>
+        </p:spPr>
+        <p:txBody>
+          <a:bodyPr/>
+          <a:p>
+            <a:pPr/>
+            <a:endParaRPr/>
+          </a:p>
+        </p:txBody>
+      </p:sp>
+      <p:sp>
+        <p:nvSpPr>
+          <p:cNvPr id="19" name="Shape 20"/>
+          <p:cNvSpPr/>
+          <p:nvPr/>
+        </p:nvSpPr>
+        <p:spPr>
+          <a:xfrm>
+            <a:off x="2505456" y="3056382"/>
+            <a:ext cx="2295144" cy="914"/>
+          </a:xfrm>
+          <a:prstGeom prst="line">
+            <a:avLst/>
+          </a:prstGeom>
+          <a:noFill/>
+          <a:ln w="10160">
+            <a:solidFill>
+              <a:srgbClr val="666666"/>
+            </a:solidFill>
+            <a:prstDash val="solid"/>
+          </a:ln>
+        </p:spPr>
+        <p:txBody>
+          <a:bodyPr/>
+          <a:p>
+            <a:pPr/>
+            <a:endParaRPr/>
+          </a:p>
+        </p:txBody>
+      </p:sp>
+      <p:sp>
+        <p:nvSpPr>
+          <p:cNvPr id="20" name="Shape 21"/>
+          <p:cNvSpPr/>
+          <p:nvPr/>
+        </p:nvSpPr>
+        <p:spPr>
+          <a:xfrm flipV="1">
+            <a:off x="4800600" y="2708910"/>
+            <a:ext cx="914" cy="347472"/>
+          </a:xfrm>
+          <a:prstGeom prst="line">
+            <a:avLst/>
+          </a:prstGeom>
+          <a:noFill/>
+          <a:ln w="10160">
+            <a:solidFill>
+              <a:srgbClr val="666666"/>
+            </a:solidFill>
+            <a:prstDash val="solid"/>
+            <a:tailEnd type="triangle"/>
+          </a:ln>
+        </p:spPr>
+        <p:txBody>
+          <a:bodyPr/>
+          <a:p>
+            <a:pPr/>
+            <a:endParaRPr/>
+          </a:p>
+        </p:txBody>
+      </p:sp>
+      <p:sp>
+        <p:nvSpPr>
+          <p:cNvPr id="21" name="Shape 22"/>
+          <p:cNvSpPr/>
+          <p:nvPr/>
+        </p:nvSpPr>
+        <p:spPr>
+          <a:xfrm rot="0" flipH="0" flipV="0">
+            <a:off x="4937760" y="2571750"/>
+            <a:ext cx="786384" cy="913"/>
+          </a:xfrm>
+          <a:prstGeom prst="line">
+            <a:avLst/>
+          </a:prstGeom>
+          <a:noFill/>
+          <a:ln w="10160">
+            <a:solidFill>
+              <a:srgbClr val="666666"/>
+            </a:solidFill>
+            <a:prstDash val="solid"/>
+            <a:tailEnd type="triangle"/>
+          </a:ln>
+        </p:spPr>
+        <p:txBody>
+          <a:bodyPr/>
+          <a:p>
+            <a:pPr/>
+            <a:endParaRPr/>
+          </a:p>
+        </p:txBody>
+      </p:sp>
+      <p:sp>
+        <p:nvSpPr>
+          <p:cNvPr id="22" name="Shape 26"/>
+          <p:cNvSpPr/>
+          <p:nvPr/>
+        </p:nvSpPr>
+        <p:spPr>
+          <a:xfrm>
+            <a:off x="5724144" y="2343150"/>
+            <a:ext cx="640080" cy="457200"/>
           </a:xfrm>
           <a:prstGeom prst="roundRect">
             <a:avLst>
-              <a:gd name="adj" fmla="val 13921"/>
+              <a:gd name="adj" fmla="val 8000"/>
             </a:avLst>
           </a:prstGeom>
           <a:solidFill>
-            <a:srgbClr val="D6E4F0"/>
-          </a:solidFill>
-          <a:ln w="9525">
+            <a:srgbClr val="DDEAF6"/>
+          </a:solidFill>
+          <a:ln w="10160">
             <a:solidFill>
-              <a:srgbClr val="B0C4DE"/>
+              <a:srgbClr val="5B9BD5"/>
             </a:solidFill>
+            <a:prstDash val="solid"/>
           </a:ln>
         </p:spPr>
         <p:txBody>
-          <a:bodyPr wrap="square" rtlCol="0" anchor="ctr"/>
-          <a:lstStyle/>
-          <a:p>
-            <a:pPr marL="0" indent="0">
-              <a:buNone/>
-            </a:pPr>
-            <a:endParaRPr lang="en-US" dirty="0"/>
-          </a:p>
-        </p:txBody>
-      </p:sp>
-      <p:sp>
-        <p:nvSpPr>
-          <p:cNvPr id="24" name="Text 23"/>
-          <p:cNvSpPr/>
-          <p:nvPr/>
-        </p:nvSpPr>
-        <p:spPr>
-          <a:xfrm>
-            <a:off x="6375566" y="2500164"/>
-            <a:ext cx="266417" cy="142875"/>
+          <a:bodyPr/>
+          <a:p>
+            <a:pPr/>
+            <a:endParaRPr/>
+          </a:p>
+        </p:txBody>
+      </p:sp>
+      <p:sp>
+        <p:nvSpPr>
+          <p:cNvPr id="23" name="Text 27"/>
+          <p:cNvSpPr/>
+          <p:nvPr/>
+        </p:nvSpPr>
+        <p:spPr>
+          <a:xfrm>
+            <a:off x="5724144" y="2343150"/>
+            <a:ext cx="640080" cy="457200"/>
           </a:xfrm>
           <a:prstGeom prst="rect">
             <a:avLst/>
@@ -1672,198 +1601,286 @@
           <a:ln/>
         </p:spPr>
         <p:txBody>
-          <a:bodyPr wrap="square" lIns="0" tIns="0" rIns="0" bIns="0" rtlCol="0" anchor="t"/>
+          <a:bodyPr wrap="square" rtlCol="0" anchor="ctr"/>
           <a:lstStyle/>
           <a:p>
             <a:pPr marL="0" indent="0" algn="ctr">
               <a:buNone/>
             </a:pPr>
             <a:r>
-              <a:rPr lang="en-US" sz="1000" dirty="0">
+              <a:rPr lang="en-US" sz="900" dirty="0">
                 <a:solidFill>
                   <a:srgbClr val="333333"/>
                 </a:solidFill>
-                <a:latin typeface="Arial" pitchFamily="34" charset="0"/>
-                <a:ea typeface="Arial" pitchFamily="34" charset="-122"/>
-                <a:cs typeface="Arial" pitchFamily="34" charset="-120"/>
+                <a:latin typeface="Times New Roman" pitchFamily="34" charset="0"/>
+                <a:ea typeface="Times New Roman" pitchFamily="34" charset="-122"/>
+                <a:cs typeface="Times New Roman" pitchFamily="34" charset="-120"/>
               </a:rPr>
               <a:t>MLP</a:t>
             </a:r>
-            <a:endParaRPr lang="en-US" sz="1000" dirty="0"/>
-          </a:p>
-        </p:txBody>
-      </p:sp>
-      <p:sp>
-        <p:nvSpPr>
-          <p:cNvPr id="25" name="Text 24"/>
-          <p:cNvSpPr/>
-          <p:nvPr/>
-        </p:nvSpPr>
-        <p:spPr>
-          <a:xfrm>
-            <a:off x="6801296" y="2558951"/>
-            <a:ext cx="101501" cy="25301"/>
+            <a:endParaRPr lang="en-US" sz="900" dirty="0"/>
+          </a:p>
+        </p:txBody>
+      </p:sp>
+      <p:sp>
+        <p:nvSpPr>
+          <p:cNvPr id="24" name="Shape 28"/>
+          <p:cNvSpPr/>
+          <p:nvPr/>
+        </p:nvSpPr>
+        <p:spPr>
+          <a:xfrm>
+            <a:off x="6364224" y="2571750"/>
+            <a:ext cx="164592" cy="914"/>
+          </a:xfrm>
+          <a:prstGeom prst="line">
+            <a:avLst/>
+          </a:prstGeom>
+          <a:noFill/>
+          <a:ln w="10160">
+            <a:solidFill>
+              <a:srgbClr val="666666"/>
+            </a:solidFill>
+            <a:prstDash val="solid"/>
+          </a:ln>
+        </p:spPr>
+        <p:txBody>
+          <a:bodyPr/>
+          <a:p>
+            <a:pPr/>
+            <a:endParaRPr/>
+          </a:p>
+        </p:txBody>
+      </p:sp>
+      <p:sp>
+        <p:nvSpPr>
+          <p:cNvPr id="25" name="Shape 29"/>
+          <p:cNvSpPr/>
+          <p:nvPr/>
+        </p:nvSpPr>
+        <p:spPr>
+          <a:xfrm>
+            <a:off x="6528816" y="2434590"/>
+            <a:ext cx="274320" cy="274320"/>
+          </a:xfrm>
+          <a:prstGeom prst="ellipse">
+            <a:avLst/>
+          </a:prstGeom>
+          <a:solidFill>
+            <a:srgbClr val="FFFFFF"/>
+          </a:solidFill>
+          <a:ln w="10160">
+            <a:solidFill>
+              <a:srgbClr val="999999"/>
+            </a:solidFill>
+            <a:prstDash val="solid"/>
+          </a:ln>
+        </p:spPr>
+        <p:txBody>
+          <a:bodyPr/>
+          <a:p>
+            <a:pPr/>
+            <a:endParaRPr/>
+          </a:p>
+        </p:txBody>
+      </p:sp>
+      <p:sp>
+        <p:nvSpPr>
+          <p:cNvPr id="26" name="Text 30"/>
+          <p:cNvSpPr/>
+          <p:nvPr/>
+        </p:nvSpPr>
+        <p:spPr>
+          <a:xfrm>
+            <a:off x="6528816" y="2434590"/>
+            <a:ext cx="274320" cy="274320"/>
           </a:xfrm>
           <a:prstGeom prst="rect">
             <a:avLst/>
           </a:prstGeom>
-          <a:solidFill>
-            <a:srgbClr val="333333"/>
-          </a:solidFill>
+          <a:noFill/>
           <a:ln/>
         </p:spPr>
         <p:txBody>
           <a:bodyPr wrap="square" rtlCol="0" anchor="ctr"/>
           <a:lstStyle/>
           <a:p>
-            <a:pPr marL="0" indent="0">
-              <a:buNone/>
-            </a:pPr>
-            <a:endParaRPr lang="en-US" dirty="0"/>
-          </a:p>
-        </p:txBody>
-      </p:sp>
-      <p:sp>
-        <p:nvSpPr>
-          <p:cNvPr id="26" name="Text 25"/>
-          <p:cNvSpPr/>
-          <p:nvPr/>
-        </p:nvSpPr>
-        <p:spPr>
-          <a:xfrm>
-            <a:off x="6902797" y="2412950"/>
-            <a:ext cx="317450" cy="317450"/>
-          </a:xfrm>
-          <a:prstGeom prst="roundRect">
-            <a:avLst>
-              <a:gd name="adj" fmla="val 288045"/>
-            </a:avLst>
-          </a:prstGeom>
-          <a:solidFill>
-            <a:srgbClr val="FFFFFF"/>
-          </a:solidFill>
-          <a:ln w="19050">
-            <a:solidFill>
-              <a:srgbClr val="333333"/>
-            </a:solidFill>
-          </a:ln>
-        </p:spPr>
-        <p:txBody>
-          <a:bodyPr wrap="square" rtlCol="0" anchor="ctr"/>
-          <a:lstStyle/>
-          <a:p>
-            <a:pPr marL="0" indent="0">
-              <a:buNone/>
-            </a:pPr>
-            <a:endParaRPr lang="en-US" dirty="0"/>
-          </a:p>
-        </p:txBody>
-      </p:sp>
-      <p:sp>
-        <p:nvSpPr>
-          <p:cNvPr id="27" name="Text 26"/>
-          <p:cNvSpPr/>
-          <p:nvPr/>
-        </p:nvSpPr>
-        <p:spPr>
-          <a:xfrm>
-            <a:off x="7016948" y="2485876"/>
-            <a:ext cx="90779" cy="171450"/>
-          </a:xfrm>
-          <a:prstGeom prst="rect">
-            <a:avLst/>
-          </a:prstGeom>
-          <a:noFill/>
-          <a:ln/>
-        </p:spPr>
-        <p:txBody>
-          <a:bodyPr wrap="square" lIns="0" tIns="0" rIns="0" bIns="0" rtlCol="0" anchor="t"/>
-          <a:lstStyle/>
-          <a:p>
-            <a:pPr marL="0" indent="0" algn="l">
+            <a:pPr marL="0" indent="0" algn="ctr">
               <a:buNone/>
             </a:pPr>
             <a:r>
-              <a:rPr lang="en-US" sz="1200" b="1" dirty="0">
+              <a:rPr lang="en-US" sz="1000" b="1" dirty="0">
                 <a:solidFill>
                   <a:srgbClr val="333333"/>
                 </a:solidFill>
-                <a:latin typeface="Arial" pitchFamily="34" charset="0"/>
-                <a:ea typeface="Arial" pitchFamily="34" charset="-122"/>
-                <a:cs typeface="Arial" pitchFamily="34" charset="-120"/>
+                <a:latin typeface="Times New Roman" pitchFamily="34" charset="0"/>
+                <a:ea typeface="Times New Roman" pitchFamily="34" charset="-122"/>
+                <a:cs typeface="Times New Roman" pitchFamily="34" charset="-120"/>
               </a:rPr>
               <a:t>+</a:t>
             </a:r>
-            <a:endParaRPr lang="en-US" sz="1200" dirty="0"/>
-          </a:p>
-        </p:txBody>
-      </p:sp>
-      <p:sp>
-        <p:nvSpPr>
-          <p:cNvPr id="28" name="Text 27"/>
-          <p:cNvSpPr/>
-          <p:nvPr/>
-        </p:nvSpPr>
-        <p:spPr>
-          <a:xfrm>
-            <a:off x="7220248" y="2558951"/>
-            <a:ext cx="152400" cy="25301"/>
+            <a:endParaRPr lang="en-US" sz="1000" dirty="0"/>
+          </a:p>
+        </p:txBody>
+      </p:sp>
+      <p:sp>
+        <p:nvSpPr>
+          <p:cNvPr id="27" name="Shape 31"/>
+          <p:cNvSpPr/>
+          <p:nvPr/>
+        </p:nvSpPr>
+        <p:spPr>
+          <a:xfrm flipV="1">
+            <a:off x="5102352" y="2087118"/>
+            <a:ext cx="914" cy="484632"/>
+          </a:xfrm>
+          <a:prstGeom prst="line">
+            <a:avLst/>
+          </a:prstGeom>
+          <a:noFill/>
+          <a:ln w="10160">
+            <a:solidFill>
+              <a:srgbClr val="666666"/>
+            </a:solidFill>
+            <a:prstDash val="solid"/>
+          </a:ln>
+        </p:spPr>
+        <p:txBody>
+          <a:bodyPr/>
+          <a:p>
+            <a:pPr/>
+            <a:endParaRPr/>
+          </a:p>
+        </p:txBody>
+      </p:sp>
+      <p:sp>
+        <p:nvSpPr>
+          <p:cNvPr id="28" name="Shape 32"/>
+          <p:cNvSpPr/>
+          <p:nvPr/>
+        </p:nvSpPr>
+        <p:spPr>
+          <a:xfrm>
+            <a:off x="5102352" y="2087118"/>
+            <a:ext cx="1563624" cy="914"/>
+          </a:xfrm>
+          <a:prstGeom prst="line">
+            <a:avLst/>
+          </a:prstGeom>
+          <a:noFill/>
+          <a:ln w="10160">
+            <a:solidFill>
+              <a:srgbClr val="666666"/>
+            </a:solidFill>
+            <a:prstDash val="solid"/>
+          </a:ln>
+        </p:spPr>
+        <p:txBody>
+          <a:bodyPr/>
+          <a:p>
+            <a:pPr/>
+            <a:endParaRPr/>
+          </a:p>
+        </p:txBody>
+      </p:sp>
+      <p:sp>
+        <p:nvSpPr>
+          <p:cNvPr id="29" name="Shape 33"/>
+          <p:cNvSpPr/>
+          <p:nvPr/>
+        </p:nvSpPr>
+        <p:spPr>
+          <a:xfrm>
+            <a:off x="6665976" y="2087118"/>
+            <a:ext cx="914" cy="347472"/>
+          </a:xfrm>
+          <a:prstGeom prst="line">
+            <a:avLst/>
+          </a:prstGeom>
+          <a:noFill/>
+          <a:ln w="10160">
+            <a:solidFill>
+              <a:srgbClr val="666666"/>
+            </a:solidFill>
+            <a:prstDash val="solid"/>
+            <a:tailEnd type="triangle"/>
+          </a:ln>
+        </p:spPr>
+        <p:txBody>
+          <a:bodyPr/>
+          <a:p>
+            <a:pPr/>
+            <a:endParaRPr/>
+          </a:p>
+        </p:txBody>
+      </p:sp>
+      <p:sp>
+        <p:nvSpPr>
+          <p:cNvPr id="30" name="Shape 34"/>
+          <p:cNvSpPr/>
+          <p:nvPr/>
+        </p:nvSpPr>
+        <p:spPr>
+          <a:xfrm rot="0" flipH="0" flipV="0">
+            <a:off x="6803136" y="2571750"/>
+            <a:ext cx="274320" cy="914"/>
+          </a:xfrm>
+          <a:prstGeom prst="line">
+            <a:avLst/>
+          </a:prstGeom>
+          <a:noFill/>
+          <a:ln w="10160">
+            <a:solidFill>
+              <a:srgbClr val="666666"/>
+            </a:solidFill>
+            <a:prstDash val="solid"/>
+            <a:tailEnd type="triangle"/>
+          </a:ln>
+        </p:spPr>
+        <p:txBody>
+          <a:bodyPr/>
+          <a:p>
+            <a:pPr/>
+            <a:endParaRPr/>
+          </a:p>
+        </p:txBody>
+      </p:sp>
+      <p:sp>
+        <p:nvSpPr>
+          <p:cNvPr id="31" name="Text 35"/>
+          <p:cNvSpPr/>
+          <p:nvPr/>
+        </p:nvSpPr>
+        <p:spPr>
+          <a:xfrm rot="0" flipH="0" flipV="0">
+            <a:off x="7077456" y="2479421"/>
+            <a:ext cx="457200" cy="182880"/>
           </a:xfrm>
           <a:prstGeom prst="rect">
             <a:avLst/>
           </a:prstGeom>
-          <a:solidFill>
-            <a:srgbClr val="333333"/>
-          </a:solidFill>
+          <a:noFill/>
           <a:ln/>
         </p:spPr>
         <p:txBody>
           <a:bodyPr wrap="square" rtlCol="0" anchor="ctr"/>
           <a:lstStyle/>
           <a:p>
-            <a:pPr marL="0" indent="0">
-              <a:buNone/>
-            </a:pPr>
-            <a:endParaRPr lang="en-US" dirty="0"/>
-          </a:p>
-        </p:txBody>
-      </p:sp>
-      <p:sp>
-        <p:nvSpPr>
-          <p:cNvPr id="29" name="Text 28"/>
-          <p:cNvSpPr/>
-          <p:nvPr/>
-        </p:nvSpPr>
-        <p:spPr>
-          <a:xfrm>
-            <a:off x="7423398" y="2523976"/>
-            <a:ext cx="272186" cy="95250"/>
-          </a:xfrm>
-          <a:prstGeom prst="rect">
-            <a:avLst/>
-          </a:prstGeom>
-          <a:noFill/>
-          <a:ln/>
-        </p:spPr>
-        <p:txBody>
-          <a:bodyPr wrap="square" lIns="0" tIns="0" rIns="0" bIns="0" rtlCol="0" anchor="t"/>
-          <a:lstStyle/>
-          <a:p>
-            <a:pPr marL="0" indent="0" algn="l">
+            <a:pPr marL="0" indent="0" algn="ctr">
               <a:buNone/>
             </a:pPr>
             <a:r>
-              <a:rPr lang="en-US" sz="700" i="1" dirty="0">
+              <a:rPr lang="en-US" sz="900" dirty="0">
                 <a:solidFill>
-                  <a:srgbClr val="666666"/>
+                  <a:srgbClr val="999999"/>
                 </a:solidFill>
-                <a:latin typeface="Arial" pitchFamily="34" charset="0"/>
-                <a:ea typeface="Arial" pitchFamily="34" charset="-122"/>
-                <a:cs typeface="Arial" pitchFamily="34" charset="-120"/>
+                <a:latin typeface="Times New Roman" pitchFamily="34" charset="0"/>
+                <a:ea typeface="Times New Roman" pitchFamily="34" charset="-122"/>
+                <a:cs typeface="Times New Roman" pitchFamily="34" charset="-120"/>
               </a:rPr>
               <a:t>Output</a:t>
             </a:r>
-            <a:endParaRPr lang="en-US" sz="700" dirty="0"/>
+            <a:endParaRPr lang="en-US" sz="900" dirty="0"/>
           </a:p>
         </p:txBody>
       </p:sp>
